--- a/Solid Rock, The (My Hope Is Built).pptx
+++ b/Solid Rock, The (My Hope Is Built).pptx
@@ -250,7 +250,7 @@
           <a:p>
             <a:fld id="{E759A0DE-F190-5444-87AC-4719D5F20D15}" type="datetimeFigureOut">
               <a:rPr lang="en-US" smtClean="0"/>
-              <a:t>6/19/26</a:t>
+              <a:t>7/14/26</a:t>
             </a:fld>
             <a:endParaRPr lang="en-US"/>
           </a:p>
@@ -420,7 +420,7 @@
           <a:p>
             <a:fld id="{E759A0DE-F190-5444-87AC-4719D5F20D15}" type="datetimeFigureOut">
               <a:rPr lang="en-US" smtClean="0"/>
-              <a:t>6/19/26</a:t>
+              <a:t>7/14/26</a:t>
             </a:fld>
             <a:endParaRPr lang="en-US"/>
           </a:p>
@@ -600,7 +600,7 @@
           <a:p>
             <a:fld id="{E759A0DE-F190-5444-87AC-4719D5F20D15}" type="datetimeFigureOut">
               <a:rPr lang="en-US" smtClean="0"/>
-              <a:t>6/19/26</a:t>
+              <a:t>7/14/26</a:t>
             </a:fld>
             <a:endParaRPr lang="en-US"/>
           </a:p>
@@ -770,7 +770,7 @@
           <a:p>
             <a:fld id="{E759A0DE-F190-5444-87AC-4719D5F20D15}" type="datetimeFigureOut">
               <a:rPr lang="en-US" smtClean="0"/>
-              <a:t>6/19/26</a:t>
+              <a:t>7/14/26</a:t>
             </a:fld>
             <a:endParaRPr lang="en-US"/>
           </a:p>
@@ -1016,7 +1016,7 @@
           <a:p>
             <a:fld id="{E759A0DE-F190-5444-87AC-4719D5F20D15}" type="datetimeFigureOut">
               <a:rPr lang="en-US" smtClean="0"/>
-              <a:t>6/19/26</a:t>
+              <a:t>7/14/26</a:t>
             </a:fld>
             <a:endParaRPr lang="en-US"/>
           </a:p>
@@ -1248,7 +1248,7 @@
           <a:p>
             <a:fld id="{E759A0DE-F190-5444-87AC-4719D5F20D15}" type="datetimeFigureOut">
               <a:rPr lang="en-US" smtClean="0"/>
-              <a:t>6/19/26</a:t>
+              <a:t>7/14/26</a:t>
             </a:fld>
             <a:endParaRPr lang="en-US"/>
           </a:p>
@@ -1615,7 +1615,7 @@
           <a:p>
             <a:fld id="{E759A0DE-F190-5444-87AC-4719D5F20D15}" type="datetimeFigureOut">
               <a:rPr lang="en-US" smtClean="0"/>
-              <a:t>6/19/26</a:t>
+              <a:t>7/14/26</a:t>
             </a:fld>
             <a:endParaRPr lang="en-US"/>
           </a:p>
@@ -1733,7 +1733,7 @@
           <a:p>
             <a:fld id="{E759A0DE-F190-5444-87AC-4719D5F20D15}" type="datetimeFigureOut">
               <a:rPr lang="en-US" smtClean="0"/>
-              <a:t>6/19/26</a:t>
+              <a:t>7/14/26</a:t>
             </a:fld>
             <a:endParaRPr lang="en-US"/>
           </a:p>
@@ -1828,7 +1828,7 @@
           <a:p>
             <a:fld id="{E759A0DE-F190-5444-87AC-4719D5F20D15}" type="datetimeFigureOut">
               <a:rPr lang="en-US" smtClean="0"/>
-              <a:t>6/19/26</a:t>
+              <a:t>7/14/26</a:t>
             </a:fld>
             <a:endParaRPr lang="en-US"/>
           </a:p>
@@ -2105,7 +2105,7 @@
           <a:p>
             <a:fld id="{E759A0DE-F190-5444-87AC-4719D5F20D15}" type="datetimeFigureOut">
               <a:rPr lang="en-US" smtClean="0"/>
-              <a:t>6/19/26</a:t>
+              <a:t>7/14/26</a:t>
             </a:fld>
             <a:endParaRPr lang="en-US"/>
           </a:p>
@@ -2362,7 +2362,7 @@
           <a:p>
             <a:fld id="{E759A0DE-F190-5444-87AC-4719D5F20D15}" type="datetimeFigureOut">
               <a:rPr lang="en-US" smtClean="0"/>
-              <a:t>6/19/26</a:t>
+              <a:t>7/14/26</a:t>
             </a:fld>
             <a:endParaRPr lang="en-US"/>
           </a:p>
@@ -2575,7 +2575,7 @@
           <a:p>
             <a:fld id="{E759A0DE-F190-5444-87AC-4719D5F20D15}" type="datetimeFigureOut">
               <a:rPr lang="en-US" smtClean="0"/>
-              <a:t>6/19/26</a:t>
+              <a:t>7/14/26</a:t>
             </a:fld>
             <a:endParaRPr lang="en-US"/>
           </a:p>
@@ -3049,6 +3049,79 @@
           </a:p>
         </p:txBody>
       </p:sp>
+      <p:sp>
+        <p:nvSpPr>
+          <p:cNvPr id="2" name="TextBox 1">
+            <a:extLst>
+              <a:ext uri="{FF2B5EF4-FFF2-40B4-BE49-F238E27FC236}">
+                <a16:creationId xmlns:a16="http://schemas.microsoft.com/office/drawing/2014/main" id="{7B606228-D316-4E35-E874-219681DCCB4E}"/>
+              </a:ext>
+            </a:extLst>
+          </p:cNvPr>
+          <p:cNvSpPr txBox="1"/>
+          <p:nvPr/>
+        </p:nvSpPr>
+        <p:spPr>
+          <a:xfrm>
+            <a:off x="168442" y="5444311"/>
+            <a:ext cx="8807115" cy="1200329"/>
+          </a:xfrm>
+          <a:prstGeom prst="rect">
+            <a:avLst/>
+          </a:prstGeom>
+          <a:noFill/>
+        </p:spPr>
+        <p:txBody>
+          <a:bodyPr wrap="square" rtlCol="0">
+            <a:spAutoFit/>
+          </a:bodyPr>
+          <a:lstStyle/>
+          <a:p>
+            <a:pPr algn="ctr"/>
+            <a:r>
+              <a:rPr lang="en-US" dirty="0">
+                <a:solidFill>
+                  <a:schemeClr val="bg1"/>
+                </a:solidFill>
+              </a:rPr>
+              <a:t>Words by Edward Mote (1834)</a:t>
+            </a:r>
+          </a:p>
+          <a:p>
+            <a:pPr algn="ctr"/>
+            <a:r>
+              <a:rPr lang="en-US" dirty="0">
+                <a:solidFill>
+                  <a:schemeClr val="bg1"/>
+                </a:solidFill>
+              </a:rPr>
+              <a:t>Music by William B. Bradbury (1863)</a:t>
+            </a:r>
+          </a:p>
+          <a:p>
+            <a:pPr algn="ctr"/>
+            <a:r>
+              <a:rPr lang="en-US" dirty="0">
+                <a:solidFill>
+                  <a:schemeClr val="bg1"/>
+                </a:solidFill>
+              </a:rPr>
+              <a:t>Public Domain</a:t>
+            </a:r>
+          </a:p>
+          <a:p>
+            <a:pPr algn="ctr"/>
+            <a:r>
+              <a:rPr lang="en-US" dirty="0">
+                <a:solidFill>
+                  <a:schemeClr val="bg1"/>
+                </a:solidFill>
+              </a:rPr>
+              <a:t>CCLI License #137776</a:t>
+            </a:r>
+          </a:p>
+        </p:txBody>
+      </p:sp>
     </p:spTree>
     <p:extLst>
       <p:ext uri="{BB962C8B-B14F-4D97-AF65-F5344CB8AC3E}">
